--- a/course-lab_3/result/Lab3.pptx
+++ b/course-lab_3/result/Lab3.pptx
@@ -233,7 +233,7 @@
           <a:p>
             <a:fld id="{39DDF730-D5BD-408C-AAAF-86ED09196212}" type="datetimeFigureOut">
               <a:rPr lang="zh-TW" altLang="en-US" smtClean="0"/>
-              <a:t>2024/10/22</a:t>
+              <a:t>2024/12/28</a:t>
             </a:fld>
             <a:endParaRPr lang="zh-TW" altLang="en-US"/>
           </a:p>
@@ -618,7 +618,7 @@
           <a:p>
             <a:fld id="{E0AA64B4-4327-4F6A-A140-5BDED692BA99}" type="datetimeFigureOut">
               <a:rPr lang="zh-TW" altLang="en-US" smtClean="0"/>
-              <a:t>2024/10/22</a:t>
+              <a:t>2024/12/28</a:t>
             </a:fld>
             <a:endParaRPr lang="zh-TW" altLang="en-US"/>
           </a:p>
@@ -1405,7 +1405,7 @@
           <a:p>
             <a:fld id="{E0AA64B4-4327-4F6A-A140-5BDED692BA99}" type="datetimeFigureOut">
               <a:rPr lang="zh-TW" altLang="en-US" smtClean="0"/>
-              <a:t>2024/10/22</a:t>
+              <a:t>2024/12/28</a:t>
             </a:fld>
             <a:endParaRPr lang="zh-TW" altLang="en-US"/>
           </a:p>
@@ -1585,7 +1585,7 @@
           <a:p>
             <a:fld id="{E0AA64B4-4327-4F6A-A140-5BDED692BA99}" type="datetimeFigureOut">
               <a:rPr lang="zh-TW" altLang="en-US" smtClean="0"/>
-              <a:t>2024/10/22</a:t>
+              <a:t>2024/12/28</a:t>
             </a:fld>
             <a:endParaRPr lang="zh-TW" altLang="en-US"/>
           </a:p>
@@ -1794,7 +1794,7 @@
           <a:p>
             <a:fld id="{E0AA64B4-4327-4F6A-A140-5BDED692BA99}" type="datetimeFigureOut">
               <a:rPr lang="zh-TW" altLang="en-US" smtClean="0"/>
-              <a:t>2024/10/22</a:t>
+              <a:t>2024/12/28</a:t>
             </a:fld>
             <a:endParaRPr lang="zh-TW" altLang="en-US"/>
           </a:p>
@@ -2182,7 +2182,7 @@
           <a:p>
             <a:fld id="{E0AA64B4-4327-4F6A-A140-5BDED692BA99}" type="datetimeFigureOut">
               <a:rPr lang="zh-TW" altLang="en-US" smtClean="0"/>
-              <a:t>2024/10/22</a:t>
+              <a:t>2024/12/28</a:t>
             </a:fld>
             <a:endParaRPr lang="zh-TW" altLang="en-US"/>
           </a:p>
@@ -2414,7 +2414,7 @@
           <a:p>
             <a:fld id="{E0AA64B4-4327-4F6A-A140-5BDED692BA99}" type="datetimeFigureOut">
               <a:rPr lang="zh-TW" altLang="en-US" smtClean="0"/>
-              <a:t>2024/10/22</a:t>
+              <a:t>2024/12/28</a:t>
             </a:fld>
             <a:endParaRPr lang="zh-TW" altLang="en-US"/>
           </a:p>
@@ -2761,7 +2761,7 @@
           <a:p>
             <a:fld id="{E0AA64B4-4327-4F6A-A140-5BDED692BA99}" type="datetimeFigureOut">
               <a:rPr lang="zh-TW" altLang="en-US" smtClean="0"/>
-              <a:t>2024/10/22</a:t>
+              <a:t>2024/12/28</a:t>
             </a:fld>
             <a:endParaRPr lang="zh-TW" altLang="en-US"/>
           </a:p>
@@ -2879,7 +2879,7 @@
           <a:p>
             <a:fld id="{E0AA64B4-4327-4F6A-A140-5BDED692BA99}" type="datetimeFigureOut">
               <a:rPr lang="zh-TW" altLang="en-US" smtClean="0"/>
-              <a:t>2024/10/22</a:t>
+              <a:t>2024/12/28</a:t>
             </a:fld>
             <a:endParaRPr lang="zh-TW" altLang="en-US"/>
           </a:p>
@@ -2997,7 +2997,7 @@
           <a:p>
             <a:fld id="{E0AA64B4-4327-4F6A-A140-5BDED692BA99}" type="datetimeFigureOut">
               <a:rPr lang="zh-TW" altLang="en-US" smtClean="0"/>
-              <a:t>2024/10/22</a:t>
+              <a:t>2024/12/28</a:t>
             </a:fld>
             <a:endParaRPr lang="zh-TW" altLang="en-US"/>
           </a:p>
@@ -3281,7 +3281,7 @@
           <a:p>
             <a:fld id="{E0AA64B4-4327-4F6A-A140-5BDED692BA99}" type="datetimeFigureOut">
               <a:rPr lang="zh-TW" altLang="en-US" smtClean="0"/>
-              <a:t>2024/10/22</a:t>
+              <a:t>2024/12/28</a:t>
             </a:fld>
             <a:endParaRPr lang="zh-TW" altLang="en-US"/>
           </a:p>
@@ -3545,7 +3545,7 @@
           <a:p>
             <a:fld id="{E0AA64B4-4327-4F6A-A140-5BDED692BA99}" type="datetimeFigureOut">
               <a:rPr lang="zh-TW" altLang="en-US" smtClean="0"/>
-              <a:t>2024/10/22</a:t>
+              <a:t>2024/12/28</a:t>
             </a:fld>
             <a:endParaRPr lang="zh-TW" altLang="en-US"/>
           </a:p>
@@ -3759,7 +3759,7 @@
           <a:p>
             <a:fld id="{E0AA64B4-4327-4F6A-A140-5BDED692BA99}" type="datetimeFigureOut">
               <a:rPr lang="zh-TW" altLang="en-US" smtClean="0"/>
-              <a:t>2024/10/22</a:t>
+              <a:t>2024/12/28</a:t>
             </a:fld>
             <a:endParaRPr lang="zh-TW" altLang="en-US"/>
           </a:p>
